--- a/docs/proof/planning-workshop.pptx
+++ b/docs/proof/planning-workshop.pptx
@@ -1866,7 +1866,7 @@
         </p:nvSpPr>
         <p:spPr>
           <a:xfrm>
-            <a:off x="27432" y="4818888"/>
+            <a:off x="3035808" y="4818888"/>
             <a:ext cx="3086100" cy="274637"/>
           </a:xfrm>
           <a:prstGeom prst="rect">
@@ -7144,7 +7144,7 @@
         </p:nvSpPr>
         <p:spPr>
           <a:xfrm>
-            <a:off x="457200" y="4818888"/>
+            <a:off x="3035808" y="4818888"/>
             <a:ext cx="3086100" cy="274320"/>
           </a:xfrm>
           <a:prstGeom prst="rect">

--- a/docs/proof/planning-workshop.pptx
+++ b/docs/proof/planning-workshop.pptx
@@ -302,7 +302,7 @@
 <c:chartSpace xmlns:c="http://schemas.openxmlformats.org/drawingml/2006/chart" xmlns:a="http://schemas.openxmlformats.org/drawingml/2006/main" xmlns:r="http://schemas.openxmlformats.org/officeDocument/2006/relationships">
   <c:date1904 val="0"/>
   <c:chart>
-    <c:autoTitleDeleted val="0"/>
+    <c:autoTitleDeleted val="1"/>
     <c:plotArea>
       <c:barChart>
         <c:barDir val="col"/>

--- a/docs/proof/planning-workshop.pptx
+++ b/docs/proof/planning-workshop.pptx
@@ -451,7 +451,7 @@
         <c:axPos val="b"/>
         <c:majorTickMark val="out"/>
         <c:minorTickMark val="none"/>
-        <c:tickLblPos val="nextTo"/>
+        <c:tickLblPos val="low"/>
         <c:spPr>
           <a:ln>
             <a:solidFill>
@@ -523,8 +523,8 @@
       </c:valAx>
     </c:plotArea>
     <c:legend>
-      <c:legendPos/>
-      <c:overlay val="1"/>
+      <c:legendPos val="b"/>
+      <c:overlay val="0"/>
       <c:txPr>
         <a:bodyPr/>
         <a:lstStyle/>
